--- a/Workshop on Ollama - Run LLMS offline.pptx
+++ b/Workshop on Ollama - Run LLMS offline.pptx
@@ -6458,22 +6458,21 @@
       </p:grpSpPr>
       <p:pic>
         <p:nvPicPr>
-          <p:cNvPr descr="Beautify this slide" id="73" name="Google Shape;73;p16"/>
+          <p:cNvPr id="73" name="Google Shape;73;p16"/>
           <p:cNvPicPr preferRelativeResize="0"/>
           <p:nvPr/>
         </p:nvPicPr>
-        <p:blipFill>
+        <p:blipFill rotWithShape="1">
           <a:blip r:embed="rId3">
             <a:alphaModFix/>
           </a:blip>
-          <a:stretch>
-            <a:fillRect/>
-          </a:stretch>
+          <a:srcRect b="10" l="0" r="0" t="10"/>
+          <a:stretch/>
         </p:blipFill>
         <p:spPr>
           <a:xfrm>
             <a:off x="-35700" y="0"/>
-            <a:ext cx="9210675" cy="5143500"/>
+            <a:ext cx="9210675" cy="5143945"/>
           </a:xfrm>
           <a:prstGeom prst="rect">
             <a:avLst/>
